--- a/docs/onboarding/06-npm-upgrade.pptx
+++ b/docs/onboarding/06-npm-upgrade.pptx
@@ -1462,7 +1462,7 @@
                 <a:ea typeface="Arial" pitchFamily="34" charset="-122"/>
                 <a:cs typeface="Arial" pitchFamily="34" charset="-120"/>
               </a:rPr>
-              <a:t>TRADE-IMPORTS-ANIMALS ONBOARDING</a:t>
+              <a:t>TRADE-IMPORTS WORKSPACE ONBOARDING</a:t>
             </a:r>
             <a:endParaRPr lang="en-US" sz="1400" dirty="0"/>
           </a:p>
@@ -2203,7 +2203,7 @@
                 <a:ea typeface="Arial" pitchFamily="34" charset="-122"/>
                 <a:cs typeface="Arial" pitchFamily="34" charset="-120"/>
               </a:rPr>
-              <a:t>trade-imports-animals onboarding</a:t>
+              <a:t>trade-imports workspace onboarding</a:t>
             </a:r>
             <a:endParaRPr lang="en-US" sz="900" dirty="0"/>
           </a:p>
@@ -2824,7 +2824,7 @@
                 <a:ea typeface="Arial" pitchFamily="34" charset="-122"/>
                 <a:cs typeface="Arial" pitchFamily="34" charset="-120"/>
               </a:rPr>
-              <a:t>trade-imports-animals onboarding</a:t>
+              <a:t>trade-imports workspace onboarding</a:t>
             </a:r>
             <a:endParaRPr lang="en-US" sz="900" dirty="0"/>
           </a:p>
@@ -3713,7 +3713,7 @@
                 <a:ea typeface="Arial" pitchFamily="34" charset="-122"/>
                 <a:cs typeface="Arial" pitchFamily="34" charset="-120"/>
               </a:rPr>
-              <a:t>trade-imports-animals onboarding</a:t>
+              <a:t>trade-imports workspace onboarding</a:t>
             </a:r>
             <a:endParaRPr lang="en-US" sz="900" dirty="0"/>
           </a:p>
@@ -4314,7 +4314,7 @@
                 <a:ea typeface="Arial" pitchFamily="34" charset="-122"/>
                 <a:cs typeface="Arial" pitchFamily="34" charset="-120"/>
               </a:rPr>
-              <a:t>trade-imports-animals onboarding</a:t>
+              <a:t>trade-imports workspace onboarding</a:t>
             </a:r>
             <a:endParaRPr lang="en-US" sz="900" dirty="0"/>
           </a:p>
@@ -4876,7 +4876,7 @@
                 <a:ea typeface="Arial" pitchFamily="34" charset="-122"/>
                 <a:cs typeface="Arial" pitchFamily="34" charset="-120"/>
               </a:rPr>
-              <a:t>trade-imports-animals onboarding</a:t>
+              <a:t>trade-imports workspace onboarding</a:t>
             </a:r>
             <a:endParaRPr lang="en-US" sz="900" dirty="0"/>
           </a:p>
